--- a/docs/DocHarbor_slides.pptx
+++ b/docs/DocHarbor_slides.pptx
@@ -9033,7 +9033,7 @@
         <p:spPr>
           <a:xfrm>
             <a:off x="10058400" y="1828800"/>
-            <a:ext cx="3200400" cy="365760"/>
+            <a:ext cx="1828800" cy="365760"/>
           </a:xfrm>
           <a:prstGeom prst="rect">
             <a:avLst/>

--- a/docs/DocHarbor_slides.pptx
+++ b/docs/DocHarbor_slides.pptx
@@ -3601,7 +3601,7 @@
                 </a:solidFill>
                 <a:latin typeface="Calibri"/>
               </a:rPr>
-              <a:t>Final score, rule-based reader</a:t>
+              <a:t>Free rule-based reader, zero API cost</a:t>
             </a:r>
           </a:p>
           <a:p>
@@ -3683,7 +3683,7 @@
             <a:avLst/>
           </a:prstGeom>
           <a:solidFill>
-            <a:srgbClr val="0E9F9A"/>
+            <a:srgbClr val="C77D0A"/>
           </a:solidFill>
           <a:ln>
             <a:noFill/>
@@ -3746,7 +3746,7 @@
                 </a:solidFill>
                 <a:latin typeface="Calibri"/>
               </a:rPr>
-              <a:t>Live web app</a:t>
+              <a:t>AI reader</a:t>
             </a:r>
           </a:p>
         </p:txBody>
@@ -3785,7 +3785,7 @@
                 </a:solidFill>
                 <a:latin typeface="Calibri"/>
               </a:rPr>
-              <a:t>Upload two documents or browse the sample inbox, in any browser, no sign-in.</a:t>
+              <a:t>[TODO: real score from evaluate_ai.py + score_cli.py] on the same scorer. The AI reads; code still decides.</a:t>
             </a:r>
           </a:p>
         </p:txBody>
@@ -3914,7 +3914,7 @@
                 </a:solidFill>
                 <a:latin typeface="Calibri"/>
               </a:rPr>
-              <a:t>AI reading</a:t>
+              <a:t>Validated, not just claimed</a:t>
             </a:r>
           </a:p>
         </p:txBody>
@@ -3953,7 +3953,7 @@
                 </a:solidFill>
                 <a:latin typeface="Calibri"/>
               </a:rPr>
-              <a:t>Claude reads every format including scans. Decisions stay in plain code.</a:t>
+              <a:t>The organizer's scorer, 4 independently generated datasets, 26 unit tests, 43 real-browser checks.</a:t>
             </a:r>
           </a:p>
         </p:txBody>
@@ -3992,7 +3992,7 @@
                 </a:solidFill>
                 <a:latin typeface="Calibri"/>
               </a:rPr>
-              <a:t>Also verified on four freshly generated datasets. The AI reader is optional and advisory; the submitted results come from the rule-based reader.</a:t>
+              <a:t>Live web app: upload two documents or browse the sample inbox, in any browser, no sign-in.</a:t>
             </a:r>
           </a:p>
         </p:txBody>
@@ -4093,7 +4093,7 @@
                 </a:solidFill>
                 <a:latin typeface="Calibri"/>
               </a:rPr>
-              <a:t>FUTURE ROADMAP</a:t>
+              <a:t>THIS IS THE PRELIMINARY ROUND ENTRY — THE ROADMAP</a:t>
             </a:r>
           </a:p>
         </p:txBody>
@@ -4132,7 +4132,7 @@
                 </a:solidFill>
                 <a:latin typeface="Calibri"/>
               </a:rPr>
-              <a:t>Where this goes next</a:t>
+              <a:t>What we'd build for the Final Round</a:t>
             </a:r>
           </a:p>
         </p:txBody>
@@ -4597,7 +4597,7 @@
                 </a:solidFill>
                 <a:latin typeface="Calibri"/>
               </a:rPr>
-              <a:t>Real sending</a:t>
+              <a:t>Real mailbox connection</a:t>
             </a:r>
           </a:p>
         </p:txBody>
@@ -4636,7 +4636,7 @@
                 </a:solidFill>
                 <a:latin typeface="Calibri"/>
               </a:rPr>
-              <a:t>Connect the Outbox to a mailbox so approved replies really go out.</a:t>
+              <a:t>Replace the simulated Outbox with a real inbox and real sending.</a:t>
             </a:r>
           </a:p>
         </p:txBody>
@@ -4765,7 +4765,7 @@
                 </a:solidFill>
                 <a:latin typeface="Calibri"/>
               </a:rPr>
-              <a:t>System integration</a:t>
+              <a:t>One-click human review</a:t>
             </a:r>
           </a:p>
         </p:txBody>
@@ -4804,7 +4804,46 @@
                 </a:solidFill>
                 <a:latin typeface="Calibri"/>
               </a:rPr>
-              <a:t>Connect to the mailbox and carrier systems so checks run automatically.</a:t>
+              <a:t>Approve or fix any NEEDS REVIEW case in one click, with an audit log.</a:t>
+            </a:r>
+          </a:p>
+        </p:txBody>
+      </p:sp>
+      <p:sp>
+        <p:nvSpPr>
+          <p:cNvPr id="21" name="TextBox 20"/>
+          <p:cNvSpPr txBox="1"/>
+          <p:nvPr/>
+        </p:nvSpPr>
+        <p:spPr>
+          <a:xfrm>
+            <a:off x="640080" y="5943600"/>
+            <a:ext cx="10972800" cy="548640"/>
+          </a:xfrm>
+          <a:prstGeom prst="rect">
+            <a:avLst/>
+          </a:prstGeom>
+          <a:noFill/>
+        </p:spPr>
+        <p:txBody>
+          <a:bodyPr wrap="square" anchor="t">
+            <a:spAutoFit/>
+          </a:bodyPr>
+          <a:lstStyle/>
+          <a:p>
+            <a:pPr algn="l">
+              <a:spcAft>
+                <a:spcPts val="600"/>
+              </a:spcAft>
+            </a:pPr>
+            <a:r>
+              <a:rPr sz="1400" b="0">
+                <a:solidFill>
+                  <a:srgbClr val="6B7280"/>
+                </a:solidFill>
+                <a:latin typeface="Calibri"/>
+              </a:rPr>
+              <a:t>The brief for the Final Round asks for an extension and improvement of this entry — this is that plan.</a:t>
             </a:r>
           </a:p>
         </p:txBody>

--- a/docs/DocHarbor_slides.pptx
+++ b/docs/DocHarbor_slides.pptx
@@ -3438,7 +3438,7 @@
                 </a:solidFill>
                 <a:latin typeface="Calibri"/>
               </a:rPr>
-              <a:t>MEASURED WITH THE ORGANIZER'S SCORER</a:t>
+              <a:t>BOTH READERS CHECKED WITH THE ORGANIZER'S OFFICIAL SCORER</a:t>
             </a:r>
           </a:p>
         </p:txBody>
@@ -3477,7 +3477,7 @@
                 </a:solidFill>
                 <a:latin typeface="Calibri"/>
               </a:rPr>
-              <a:t>Results</a:t>
+              <a:t>Results, measured, not estimated</a:t>
             </a:r>
           </a:p>
         </p:txBody>
@@ -3601,7 +3601,7 @@
                 </a:solidFill>
                 <a:latin typeface="Calibri"/>
               </a:rPr>
-              <a:t>Free rule-based reader, zero API cost</a:t>
+              <a:t>Two independent readers, the same perfect score</a:t>
             </a:r>
           </a:p>
           <a:p>
@@ -3683,7 +3683,7 @@
             <a:avLst/>
           </a:prstGeom>
           <a:solidFill>
-            <a:srgbClr val="C77D0A"/>
+            <a:srgbClr val="1E8E5A"/>
           </a:solidFill>
           <a:ln>
             <a:noFill/>
@@ -3746,7 +3746,7 @@
                 </a:solidFill>
                 <a:latin typeface="Calibri"/>
               </a:rPr>
-              <a:t>AI reader</a:t>
+              <a:t>AI reader -- measured live</a:t>
             </a:r>
           </a:p>
         </p:txBody>
@@ -3785,7 +3785,7 @@
                 </a:solidFill>
                 <a:latin typeface="Calibri"/>
               </a:rPr>
-              <a:t>[TODO: real score from evaluate_ai.py + score_cli.py] on the same scorer. The AI reads; code still decides.</a:t>
+              <a:t>1.0000, run for real with a live API key: 240 Claude calls, 220/220 comparisons exactly right, 46/46 defects caught.</a:t>
             </a:r>
           </a:p>
         </p:txBody>
@@ -3914,7 +3914,7 @@
                 </a:solidFill>
                 <a:latin typeface="Calibri"/>
               </a:rPr>
-              <a:t>Validated, not just claimed</a:t>
+              <a:t>Rule-based reader -- zero API cost</a:t>
             </a:r>
           </a:p>
         </p:txBody>
@@ -3953,7 +3953,7 @@
                 </a:solidFill>
                 <a:latin typeface="Calibri"/>
               </a:rPr>
-              <a:t>The organizer's scorer, 4 independently generated datasets, 26 unit tests, 43 real-browser checks.</a:t>
+              <a:t>The same 1.0000, with no key needed. What's live in the app by default.</a:t>
             </a:r>
           </a:p>
         </p:txBody>
@@ -3992,7 +3992,7 @@
                 </a:solidFill>
                 <a:latin typeface="Calibri"/>
               </a:rPr>
-              <a:t>Live web app: upload two documents or browse the sample inbox, in any browser, no sign-in.</a:t>
+              <a:t>Also validated: 4 independently generated datasets, 26 unit tests, 43 real-browser checks. Live web app: upload two documents or browse the sample inbox, in any browser, no sign-in.</a:t>
             </a:r>
           </a:p>
         </p:txBody>

--- a/docs/DocHarbor_slides.pptx
+++ b/docs/DocHarbor_slides.pptx
@@ -3337,7 +3337,7 @@
                 </a:solidFill>
                 <a:latin typeface="Calibri"/>
               </a:rPr>
-              <a:t>Averis-unemployed-bums  ·  Averis Hackathon 2026</a:t>
+              <a:t>Unemployed Bums  ·  Averis x Monash Hackathon 2026</a:t>
             </a:r>
           </a:p>
         </p:txBody>

--- a/docs/DocHarbor_slides.pptx
+++ b/docs/DocHarbor_slides.pptx
@@ -3785,7 +3785,7 @@
                 </a:solidFill>
                 <a:latin typeface="Calibri"/>
               </a:rPr>
-              <a:t>1.0000, run for real with a live API key: 240 Claude calls, 220/220 comparisons exactly right, 46/46 defects caught.</a:t>
+              <a:t>1.0000, run for real with a live API key: 240 Claude calls, 200/200 comparisons exactly right, plus all 20 edge cases correctly escalated.</a:t>
             </a:r>
           </a:p>
         </p:txBody>
